--- a/AMMR_H600_통합설계서.pptx
+++ b/AMMR_H600_통합설계서.pptx
@@ -7438,7 +7438,7 @@
               </a:defRPr>
             </a:pPr>
             <a:r>
-              <a:t>4단계 24개월 개발 계획</a:t>
+              <a:t>6개월 프로토타입 개발 계획</a:t>
             </a:r>
           </a:p>
         </p:txBody>
@@ -7488,14 +7488,50 @@
       </p:sp>
       <p:sp>
         <p:nvSpPr>
-          <p:cNvPr id="5" name="Rectangle 4"/>
+          <p:cNvPr id="5" name="TextBox 4"/>
+          <p:cNvSpPr txBox="1"/>
+          <p:nvPr/>
+        </p:nvSpPr>
+        <p:spPr>
+          <a:xfrm>
+            <a:off x="731520" y="1554480"/>
+            <a:ext cx="4572000" cy="365760"/>
+          </a:xfrm>
+          <a:prstGeom prst="rect">
+            <a:avLst/>
+          </a:prstGeom>
+          <a:noFill/>
+        </p:spPr>
+        <p:txBody>
+          <a:bodyPr wrap="square">
+            <a:spAutoFit/>
+          </a:bodyPr>
+          <a:lstStyle/>
+          <a:p>
+            <a:pPr algn="l">
+              <a:defRPr sz="1600" b="1">
+                <a:solidFill>
+                  <a:srgbClr val="00C853"/>
+                </a:solidFill>
+                <a:latin typeface="맑은 고딕"/>
+              </a:defRPr>
+            </a:pPr>
+            <a:r>
+              <a:t>✅ 선행 확보 사항 (기존 24개월 → 6개월 압축)</a:t>
+            </a:r>
+          </a:p>
+        </p:txBody>
+      </p:sp>
+      <p:sp>
+        <p:nvSpPr>
+          <p:cNvPr id="6" name="Rectangle 5"/>
           <p:cNvSpPr/>
           <p:nvPr/>
         </p:nvSpPr>
         <p:spPr>
           <a:xfrm>
-            <a:off x="731520" y="1645920"/>
-            <a:ext cx="2560320" cy="4572000"/>
+            <a:off x="731520" y="2011680"/>
+            <a:ext cx="5212080" cy="548640"/>
           </a:xfrm>
           <a:prstGeom prst="rect">
             <a:avLst/>
@@ -7531,14 +7567,467 @@
       </p:sp>
       <p:sp>
         <p:nvSpPr>
-          <p:cNvPr id="6" name="Rectangle 5"/>
+          <p:cNvPr id="7" name="TextBox 6"/>
+          <p:cNvSpPr txBox="1"/>
+          <p:nvPr/>
+        </p:nvSpPr>
+        <p:spPr>
+          <a:xfrm>
+            <a:off x="914400" y="2057400"/>
+            <a:ext cx="2286000" cy="228600"/>
+          </a:xfrm>
+          <a:prstGeom prst="rect">
+            <a:avLst/>
+          </a:prstGeom>
+          <a:noFill/>
+        </p:spPr>
+        <p:txBody>
+          <a:bodyPr wrap="square">
+            <a:spAutoFit/>
+          </a:bodyPr>
+          <a:lstStyle/>
+          <a:p>
+            <a:pPr algn="l">
+              <a:defRPr sz="1300" b="1">
+                <a:solidFill>
+                  <a:srgbClr val="00C853"/>
+                </a:solidFill>
+                <a:latin typeface="맑은 고딕"/>
+              </a:defRPr>
+            </a:pPr>
+            <a:r>
+              <a:t>✅ 자체 제어 시스템</a:t>
+            </a:r>
+          </a:p>
+        </p:txBody>
+      </p:sp>
+      <p:sp>
+        <p:nvSpPr>
+          <p:cNvPr id="8" name="TextBox 7"/>
+          <p:cNvSpPr txBox="1"/>
+          <p:nvPr/>
+        </p:nvSpPr>
+        <p:spPr>
+          <a:xfrm>
+            <a:off x="914400" y="2286000"/>
+            <a:ext cx="4754880" cy="228600"/>
+          </a:xfrm>
+          <a:prstGeom prst="rect">
+            <a:avLst/>
+          </a:prstGeom>
+          <a:noFill/>
+        </p:spPr>
+        <p:txBody>
+          <a:bodyPr wrap="square">
+            <a:spAutoFit/>
+          </a:bodyPr>
+          <a:lstStyle/>
+          <a:p>
+            <a:pPr algn="l">
+              <a:defRPr sz="1200" b="0">
+                <a:solidFill>
+                  <a:srgbClr val="E0E0E0"/>
+                </a:solidFill>
+                <a:latin typeface="맑은 고딕"/>
+              </a:defRPr>
+            </a:pPr>
+            <a:r>
+              <a:t>SW 개발 기간 대폭 단축</a:t>
+            </a:r>
+          </a:p>
+        </p:txBody>
+      </p:sp>
+      <p:sp>
+        <p:nvSpPr>
+          <p:cNvPr id="9" name="Rectangle 8"/>
           <p:cNvSpPr/>
           <p:nvPr/>
         </p:nvSpPr>
         <p:spPr>
           <a:xfrm>
-            <a:off x="731520" y="1645920"/>
-            <a:ext cx="2560320" cy="63500"/>
+            <a:off x="6217920" y="2011680"/>
+            <a:ext cx="5212080" cy="548640"/>
+          </a:xfrm>
+          <a:prstGeom prst="rect">
+            <a:avLst/>
+          </a:prstGeom>
+          <a:solidFill>
+            <a:srgbClr val="252540"/>
+          </a:solidFill>
+          <a:ln>
+            <a:noFill/>
+          </a:ln>
+        </p:spPr>
+        <p:style>
+          <a:lnRef idx="1">
+            <a:schemeClr val="accent1"/>
+          </a:lnRef>
+          <a:fillRef idx="3">
+            <a:schemeClr val="accent1"/>
+          </a:fillRef>
+          <a:effectRef idx="2">
+            <a:schemeClr val="accent1"/>
+          </a:effectRef>
+          <a:fontRef idx="minor">
+            <a:schemeClr val="lt1"/>
+          </a:fontRef>
+        </p:style>
+        <p:txBody>
+          <a:bodyPr rtlCol="0" anchor="ctr"/>
+          <a:lstStyle/>
+          <a:p>
+            <a:pPr algn="ctr"/>
+          </a:p>
+        </p:txBody>
+      </p:sp>
+      <p:sp>
+        <p:nvSpPr>
+          <p:cNvPr id="10" name="TextBox 9"/>
+          <p:cNvSpPr txBox="1"/>
+          <p:nvPr/>
+        </p:nvSpPr>
+        <p:spPr>
+          <a:xfrm>
+            <a:off x="6400800" y="2057400"/>
+            <a:ext cx="2286000" cy="228600"/>
+          </a:xfrm>
+          <a:prstGeom prst="rect">
+            <a:avLst/>
+          </a:prstGeom>
+          <a:noFill/>
+        </p:spPr>
+        <p:txBody>
+          <a:bodyPr wrap="square">
+            <a:spAutoFit/>
+          </a:bodyPr>
+          <a:lstStyle/>
+          <a:p>
+            <a:pPr algn="l">
+              <a:defRPr sz="1300" b="1">
+                <a:solidFill>
+                  <a:srgbClr val="00C853"/>
+                </a:solidFill>
+                <a:latin typeface="맑은 고딕"/>
+              </a:defRPr>
+            </a:pPr>
+            <a:r>
+              <a:t>✅ 자율주행 플랫폼</a:t>
+            </a:r>
+          </a:p>
+        </p:txBody>
+      </p:sp>
+      <p:sp>
+        <p:nvSpPr>
+          <p:cNvPr id="11" name="TextBox 10"/>
+          <p:cNvSpPr txBox="1"/>
+          <p:nvPr/>
+        </p:nvSpPr>
+        <p:spPr>
+          <a:xfrm>
+            <a:off x="6400800" y="2286000"/>
+            <a:ext cx="4754880" cy="228600"/>
+          </a:xfrm>
+          <a:prstGeom prst="rect">
+            <a:avLst/>
+          </a:prstGeom>
+          <a:noFill/>
+        </p:spPr>
+        <p:txBody>
+          <a:bodyPr wrap="square">
+            <a:spAutoFit/>
+          </a:bodyPr>
+          <a:lstStyle/>
+          <a:p>
+            <a:pPr algn="l">
+              <a:defRPr sz="1200" b="0">
+                <a:solidFill>
+                  <a:srgbClr val="E0E0E0"/>
+                </a:solidFill>
+                <a:latin typeface="맑은 고딕"/>
+              </a:defRPr>
+            </a:pPr>
+            <a:r>
+              <a:t>Navigation Stack 재활용</a:t>
+            </a:r>
+          </a:p>
+        </p:txBody>
+      </p:sp>
+      <p:sp>
+        <p:nvSpPr>
+          <p:cNvPr id="12" name="Rectangle 11"/>
+          <p:cNvSpPr/>
+          <p:nvPr/>
+        </p:nvSpPr>
+        <p:spPr>
+          <a:xfrm>
+            <a:off x="731520" y="2651760"/>
+            <a:ext cx="5212080" cy="548640"/>
+          </a:xfrm>
+          <a:prstGeom prst="rect">
+            <a:avLst/>
+          </a:prstGeom>
+          <a:solidFill>
+            <a:srgbClr val="252540"/>
+          </a:solidFill>
+          <a:ln>
+            <a:noFill/>
+          </a:ln>
+        </p:spPr>
+        <p:style>
+          <a:lnRef idx="1">
+            <a:schemeClr val="accent1"/>
+          </a:lnRef>
+          <a:fillRef idx="3">
+            <a:schemeClr val="accent1"/>
+          </a:fillRef>
+          <a:effectRef idx="2">
+            <a:schemeClr val="accent1"/>
+          </a:effectRef>
+          <a:fontRef idx="minor">
+            <a:schemeClr val="lt1"/>
+          </a:fontRef>
+        </p:style>
+        <p:txBody>
+          <a:bodyPr rtlCol="0" anchor="ctr"/>
+          <a:lstStyle/>
+          <a:p>
+            <a:pPr algn="ctr"/>
+          </a:p>
+        </p:txBody>
+      </p:sp>
+      <p:sp>
+        <p:nvSpPr>
+          <p:cNvPr id="13" name="TextBox 12"/>
+          <p:cNvSpPr txBox="1"/>
+          <p:nvPr/>
+        </p:nvSpPr>
+        <p:spPr>
+          <a:xfrm>
+            <a:off x="914400" y="2697480"/>
+            <a:ext cx="2286000" cy="228600"/>
+          </a:xfrm>
+          <a:prstGeom prst="rect">
+            <a:avLst/>
+          </a:prstGeom>
+          <a:noFill/>
+        </p:spPr>
+        <p:txBody>
+          <a:bodyPr wrap="square">
+            <a:spAutoFit/>
+          </a:bodyPr>
+          <a:lstStyle/>
+          <a:p>
+            <a:pPr algn="l">
+              <a:defRPr sz="1300" b="1">
+                <a:solidFill>
+                  <a:srgbClr val="00C853"/>
+                </a:solidFill>
+                <a:latin typeface="맑은 고딕"/>
+              </a:defRPr>
+            </a:pPr>
+            <a:r>
+              <a:t>✅ 선행 모델 개발 경험</a:t>
+            </a:r>
+          </a:p>
+        </p:txBody>
+      </p:sp>
+      <p:sp>
+        <p:nvSpPr>
+          <p:cNvPr id="14" name="TextBox 13"/>
+          <p:cNvSpPr txBox="1"/>
+          <p:nvPr/>
+        </p:nvSpPr>
+        <p:spPr>
+          <a:xfrm>
+            <a:off x="914400" y="2926080"/>
+            <a:ext cx="4754880" cy="228600"/>
+          </a:xfrm>
+          <a:prstGeom prst="rect">
+            <a:avLst/>
+          </a:prstGeom>
+          <a:noFill/>
+        </p:spPr>
+        <p:txBody>
+          <a:bodyPr wrap="square">
+            <a:spAutoFit/>
+          </a:bodyPr>
+          <a:lstStyle/>
+          <a:p>
+            <a:pPr algn="l">
+              <a:defRPr sz="1200" b="0">
+                <a:solidFill>
+                  <a:srgbClr val="E0E0E0"/>
+                </a:solidFill>
+                <a:latin typeface="맑은 고딕"/>
+              </a:defRPr>
+            </a:pPr>
+            <a:r>
+              <a:t>기계/전기 설계 검증 완료</a:t>
+            </a:r>
+          </a:p>
+        </p:txBody>
+      </p:sp>
+      <p:sp>
+        <p:nvSpPr>
+          <p:cNvPr id="15" name="Rectangle 14"/>
+          <p:cNvSpPr/>
+          <p:nvPr/>
+        </p:nvSpPr>
+        <p:spPr>
+          <a:xfrm>
+            <a:off x="6217920" y="2651760"/>
+            <a:ext cx="5212080" cy="548640"/>
+          </a:xfrm>
+          <a:prstGeom prst="rect">
+            <a:avLst/>
+          </a:prstGeom>
+          <a:solidFill>
+            <a:srgbClr val="252540"/>
+          </a:solidFill>
+          <a:ln>
+            <a:noFill/>
+          </a:ln>
+        </p:spPr>
+        <p:style>
+          <a:lnRef idx="1">
+            <a:schemeClr val="accent1"/>
+          </a:lnRef>
+          <a:fillRef idx="3">
+            <a:schemeClr val="accent1"/>
+          </a:fillRef>
+          <a:effectRef idx="2">
+            <a:schemeClr val="accent1"/>
+          </a:effectRef>
+          <a:fontRef idx="minor">
+            <a:schemeClr val="lt1"/>
+          </a:fontRef>
+        </p:style>
+        <p:txBody>
+          <a:bodyPr rtlCol="0" anchor="ctr"/>
+          <a:lstStyle/>
+          <a:p>
+            <a:pPr algn="ctr"/>
+          </a:p>
+        </p:txBody>
+      </p:sp>
+      <p:sp>
+        <p:nvSpPr>
+          <p:cNvPr id="16" name="TextBox 15"/>
+          <p:cNvSpPr txBox="1"/>
+          <p:nvPr/>
+        </p:nvSpPr>
+        <p:spPr>
+          <a:xfrm>
+            <a:off x="6400800" y="2697480"/>
+            <a:ext cx="2286000" cy="228600"/>
+          </a:xfrm>
+          <a:prstGeom prst="rect">
+            <a:avLst/>
+          </a:prstGeom>
+          <a:noFill/>
+        </p:spPr>
+        <p:txBody>
+          <a:bodyPr wrap="square">
+            <a:spAutoFit/>
+          </a:bodyPr>
+          <a:lstStyle/>
+          <a:p>
+            <a:pPr algn="l">
+              <a:defRPr sz="1300" b="1">
+                <a:solidFill>
+                  <a:srgbClr val="00C853"/>
+                </a:solidFill>
+                <a:latin typeface="맑은 고딕"/>
+              </a:defRPr>
+            </a:pPr>
+            <a:r>
+              <a:t>✅ AMR 기본 구동 시스템</a:t>
+            </a:r>
+          </a:p>
+        </p:txBody>
+      </p:sp>
+      <p:sp>
+        <p:nvSpPr>
+          <p:cNvPr id="17" name="TextBox 16"/>
+          <p:cNvSpPr txBox="1"/>
+          <p:nvPr/>
+        </p:nvSpPr>
+        <p:spPr>
+          <a:xfrm>
+            <a:off x="6400800" y="2926080"/>
+            <a:ext cx="4754880" cy="228600"/>
+          </a:xfrm>
+          <a:prstGeom prst="rect">
+            <a:avLst/>
+          </a:prstGeom>
+          <a:noFill/>
+        </p:spPr>
+        <p:txBody>
+          <a:bodyPr wrap="square">
+            <a:spAutoFit/>
+          </a:bodyPr>
+          <a:lstStyle/>
+          <a:p>
+            <a:pPr algn="l">
+              <a:defRPr sz="1200" b="0">
+                <a:solidFill>
+                  <a:srgbClr val="E0E0E0"/>
+                </a:solidFill>
+                <a:latin typeface="맑은 고딕"/>
+              </a:defRPr>
+            </a:pPr>
+            <a:r>
+              <a:t>프레임/구동 재설계 최소화</a:t>
+            </a:r>
+          </a:p>
+        </p:txBody>
+      </p:sp>
+      <p:sp>
+        <p:nvSpPr>
+          <p:cNvPr id="18" name="TextBox 17"/>
+          <p:cNvSpPr txBox="1"/>
+          <p:nvPr/>
+        </p:nvSpPr>
+        <p:spPr>
+          <a:xfrm>
+            <a:off x="731520" y="3474720"/>
+            <a:ext cx="4572000" cy="365760"/>
+          </a:xfrm>
+          <a:prstGeom prst="rect">
+            <a:avLst/>
+          </a:prstGeom>
+          <a:noFill/>
+        </p:spPr>
+        <p:txBody>
+          <a:bodyPr wrap="square">
+            <a:spAutoFit/>
+          </a:bodyPr>
+          <a:lstStyle/>
+          <a:p>
+            <a:pPr algn="l">
+              <a:defRPr sz="1600" b="1">
+                <a:solidFill>
+                  <a:srgbClr val="FF8C00"/>
+                </a:solidFill>
+                <a:latin typeface="맑은 고딕"/>
+              </a:defRPr>
+            </a:pPr>
+            <a:r>
+              <a:t>📅 6개월 타임라인</a:t>
+            </a:r>
+          </a:p>
+        </p:txBody>
+      </p:sp>
+      <p:sp>
+        <p:nvSpPr>
+          <p:cNvPr id="19" name="Rectangle 18"/>
+          <p:cNvSpPr/>
+          <p:nvPr/>
+        </p:nvSpPr>
+        <p:spPr>
+          <a:xfrm>
+            <a:off x="1758461" y="3931920"/>
+            <a:ext cx="1160584" cy="320040"/>
           </a:xfrm>
           <a:prstGeom prst="rect">
             <a:avLst/>
@@ -7574,14 +8063,438 @@
       </p:sp>
       <p:sp>
         <p:nvSpPr>
-          <p:cNvPr id="7" name="TextBox 6"/>
-          <p:cNvSpPr txBox="1"/>
-          <p:nvPr/>
-        </p:nvSpPr>
-        <p:spPr>
-          <a:xfrm>
-            <a:off x="914400" y="1828800"/>
-            <a:ext cx="2194560" cy="274320"/>
+          <p:cNvPr id="20" name="TextBox 19"/>
+          <p:cNvSpPr txBox="1"/>
+          <p:nvPr/>
+        </p:nvSpPr>
+        <p:spPr>
+          <a:xfrm>
+            <a:off x="1804181" y="3950208"/>
+            <a:ext cx="1069144" cy="274320"/>
+          </a:xfrm>
+          <a:prstGeom prst="rect">
+            <a:avLst/>
+          </a:prstGeom>
+          <a:noFill/>
+        </p:spPr>
+        <p:txBody>
+          <a:bodyPr wrap="square">
+            <a:spAutoFit/>
+          </a:bodyPr>
+          <a:lstStyle/>
+          <a:p>
+            <a:pPr algn="ctr">
+              <a:defRPr sz="1000" b="1">
+                <a:solidFill>
+                  <a:srgbClr val="FFFFFF"/>
+                </a:solidFill>
+                <a:latin typeface="맑은 고딕"/>
+              </a:defRPr>
+            </a:pPr>
+            <a:r>
+              <a:t>P1</a:t>
+            </a:r>
+          </a:p>
+        </p:txBody>
+      </p:sp>
+      <p:sp>
+        <p:nvSpPr>
+          <p:cNvPr id="21" name="Rectangle 20"/>
+          <p:cNvSpPr/>
+          <p:nvPr/>
+        </p:nvSpPr>
+        <p:spPr>
+          <a:xfrm>
+            <a:off x="2145323" y="3931920"/>
+            <a:ext cx="2321169" cy="320040"/>
+          </a:xfrm>
+          <a:prstGeom prst="rect">
+            <a:avLst/>
+          </a:prstGeom>
+          <a:solidFill>
+            <a:srgbClr val="FF8C00"/>
+          </a:solidFill>
+          <a:ln>
+            <a:noFill/>
+          </a:ln>
+        </p:spPr>
+        <p:style>
+          <a:lnRef idx="1">
+            <a:schemeClr val="accent1"/>
+          </a:lnRef>
+          <a:fillRef idx="3">
+            <a:schemeClr val="accent1"/>
+          </a:fillRef>
+          <a:effectRef idx="2">
+            <a:schemeClr val="accent1"/>
+          </a:effectRef>
+          <a:fontRef idx="minor">
+            <a:schemeClr val="lt1"/>
+          </a:fontRef>
+        </p:style>
+        <p:txBody>
+          <a:bodyPr rtlCol="0" anchor="ctr"/>
+          <a:lstStyle/>
+          <a:p>
+            <a:pPr algn="ctr"/>
+          </a:p>
+        </p:txBody>
+      </p:sp>
+      <p:sp>
+        <p:nvSpPr>
+          <p:cNvPr id="22" name="TextBox 21"/>
+          <p:cNvSpPr txBox="1"/>
+          <p:nvPr/>
+        </p:nvSpPr>
+        <p:spPr>
+          <a:xfrm>
+            <a:off x="2191043" y="3950208"/>
+            <a:ext cx="2229729" cy="274320"/>
+          </a:xfrm>
+          <a:prstGeom prst="rect">
+            <a:avLst/>
+          </a:prstGeom>
+          <a:noFill/>
+        </p:spPr>
+        <p:txBody>
+          <a:bodyPr wrap="square">
+            <a:spAutoFit/>
+          </a:bodyPr>
+          <a:lstStyle/>
+          <a:p>
+            <a:pPr algn="ctr">
+              <a:defRPr sz="1000" b="1">
+                <a:solidFill>
+                  <a:srgbClr val="FFFFFF"/>
+                </a:solidFill>
+                <a:latin typeface="맑은 고딕"/>
+              </a:defRPr>
+            </a:pPr>
+            <a:r>
+              <a:t>P2</a:t>
+            </a:r>
+          </a:p>
+        </p:txBody>
+      </p:sp>
+      <p:sp>
+        <p:nvSpPr>
+          <p:cNvPr id="23" name="Rectangle 22"/>
+          <p:cNvSpPr/>
+          <p:nvPr/>
+        </p:nvSpPr>
+        <p:spPr>
+          <a:xfrm>
+            <a:off x="2919046" y="3931920"/>
+            <a:ext cx="4642338" cy="320040"/>
+          </a:xfrm>
+          <a:prstGeom prst="rect">
+            <a:avLst/>
+          </a:prstGeom>
+          <a:solidFill>
+            <a:srgbClr val="00C853"/>
+          </a:solidFill>
+          <a:ln>
+            <a:noFill/>
+          </a:ln>
+        </p:spPr>
+        <p:style>
+          <a:lnRef idx="1">
+            <a:schemeClr val="accent1"/>
+          </a:lnRef>
+          <a:fillRef idx="3">
+            <a:schemeClr val="accent1"/>
+          </a:fillRef>
+          <a:effectRef idx="2">
+            <a:schemeClr val="accent1"/>
+          </a:effectRef>
+          <a:fontRef idx="minor">
+            <a:schemeClr val="lt1"/>
+          </a:fontRef>
+        </p:style>
+        <p:txBody>
+          <a:bodyPr rtlCol="0" anchor="ctr"/>
+          <a:lstStyle/>
+          <a:p>
+            <a:pPr algn="ctr"/>
+          </a:p>
+        </p:txBody>
+      </p:sp>
+      <p:sp>
+        <p:nvSpPr>
+          <p:cNvPr id="24" name="TextBox 23"/>
+          <p:cNvSpPr txBox="1"/>
+          <p:nvPr/>
+        </p:nvSpPr>
+        <p:spPr>
+          <a:xfrm>
+            <a:off x="2964766" y="3950208"/>
+            <a:ext cx="4550898" cy="274320"/>
+          </a:xfrm>
+          <a:prstGeom prst="rect">
+            <a:avLst/>
+          </a:prstGeom>
+          <a:noFill/>
+        </p:spPr>
+        <p:txBody>
+          <a:bodyPr wrap="square">
+            <a:spAutoFit/>
+          </a:bodyPr>
+          <a:lstStyle/>
+          <a:p>
+            <a:pPr algn="ctr">
+              <a:defRPr sz="1000" b="1">
+                <a:solidFill>
+                  <a:srgbClr val="FFFFFF"/>
+                </a:solidFill>
+                <a:latin typeface="맑은 고딕"/>
+              </a:defRPr>
+            </a:pPr>
+            <a:r>
+              <a:t>P3</a:t>
+            </a:r>
+          </a:p>
+        </p:txBody>
+      </p:sp>
+      <p:sp>
+        <p:nvSpPr>
+          <p:cNvPr id="25" name="Rectangle 24"/>
+          <p:cNvSpPr/>
+          <p:nvPr/>
+        </p:nvSpPr>
+        <p:spPr>
+          <a:xfrm>
+            <a:off x="6013938" y="3931920"/>
+            <a:ext cx="3868615" cy="320040"/>
+          </a:xfrm>
+          <a:prstGeom prst="rect">
+            <a:avLst/>
+          </a:prstGeom>
+          <a:solidFill>
+            <a:srgbClr val="FFD600"/>
+          </a:solidFill>
+          <a:ln>
+            <a:noFill/>
+          </a:ln>
+        </p:spPr>
+        <p:style>
+          <a:lnRef idx="1">
+            <a:schemeClr val="accent1"/>
+          </a:lnRef>
+          <a:fillRef idx="3">
+            <a:schemeClr val="accent1"/>
+          </a:fillRef>
+          <a:effectRef idx="2">
+            <a:schemeClr val="accent1"/>
+          </a:effectRef>
+          <a:fontRef idx="minor">
+            <a:schemeClr val="lt1"/>
+          </a:fontRef>
+        </p:style>
+        <p:txBody>
+          <a:bodyPr rtlCol="0" anchor="ctr"/>
+          <a:lstStyle/>
+          <a:p>
+            <a:pPr algn="ctr"/>
+          </a:p>
+        </p:txBody>
+      </p:sp>
+      <p:sp>
+        <p:nvSpPr>
+          <p:cNvPr id="26" name="TextBox 25"/>
+          <p:cNvSpPr txBox="1"/>
+          <p:nvPr/>
+        </p:nvSpPr>
+        <p:spPr>
+          <a:xfrm>
+            <a:off x="6059658" y="3950208"/>
+            <a:ext cx="3777175" cy="274320"/>
+          </a:xfrm>
+          <a:prstGeom prst="rect">
+            <a:avLst/>
+          </a:prstGeom>
+          <a:noFill/>
+        </p:spPr>
+        <p:txBody>
+          <a:bodyPr wrap="square">
+            <a:spAutoFit/>
+          </a:bodyPr>
+          <a:lstStyle/>
+          <a:p>
+            <a:pPr algn="ctr">
+              <a:defRPr sz="1000" b="1">
+                <a:solidFill>
+                  <a:srgbClr val="FFFFFF"/>
+                </a:solidFill>
+                <a:latin typeface="맑은 고딕"/>
+              </a:defRPr>
+            </a:pPr>
+            <a:r>
+              <a:t>P4</a:t>
+            </a:r>
+          </a:p>
+        </p:txBody>
+      </p:sp>
+      <p:sp>
+        <p:nvSpPr>
+          <p:cNvPr id="27" name="Rectangle 26"/>
+          <p:cNvSpPr/>
+          <p:nvPr/>
+        </p:nvSpPr>
+        <p:spPr>
+          <a:xfrm>
+            <a:off x="9108830" y="3931920"/>
+            <a:ext cx="2321169" cy="320040"/>
+          </a:xfrm>
+          <a:prstGeom prst="rect">
+            <a:avLst/>
+          </a:prstGeom>
+          <a:solidFill>
+            <a:srgbClr val="FF4545"/>
+          </a:solidFill>
+          <a:ln>
+            <a:noFill/>
+          </a:ln>
+        </p:spPr>
+        <p:style>
+          <a:lnRef idx="1">
+            <a:schemeClr val="accent1"/>
+          </a:lnRef>
+          <a:fillRef idx="3">
+            <a:schemeClr val="accent1"/>
+          </a:fillRef>
+          <a:effectRef idx="2">
+            <a:schemeClr val="accent1"/>
+          </a:effectRef>
+          <a:fontRef idx="minor">
+            <a:schemeClr val="lt1"/>
+          </a:fontRef>
+        </p:style>
+        <p:txBody>
+          <a:bodyPr rtlCol="0" anchor="ctr"/>
+          <a:lstStyle/>
+          <a:p>
+            <a:pPr algn="ctr"/>
+          </a:p>
+        </p:txBody>
+      </p:sp>
+      <p:sp>
+        <p:nvSpPr>
+          <p:cNvPr id="28" name="TextBox 27"/>
+          <p:cNvSpPr txBox="1"/>
+          <p:nvPr/>
+        </p:nvSpPr>
+        <p:spPr>
+          <a:xfrm>
+            <a:off x="9154550" y="3950208"/>
+            <a:ext cx="2229729" cy="274320"/>
+          </a:xfrm>
+          <a:prstGeom prst="rect">
+            <a:avLst/>
+          </a:prstGeom>
+          <a:noFill/>
+        </p:spPr>
+        <p:txBody>
+          <a:bodyPr wrap="square">
+            <a:spAutoFit/>
+          </a:bodyPr>
+          <a:lstStyle/>
+          <a:p>
+            <a:pPr algn="ctr">
+              <a:defRPr sz="1000" b="1">
+                <a:solidFill>
+                  <a:srgbClr val="FFFFFF"/>
+                </a:solidFill>
+                <a:latin typeface="맑은 고딕"/>
+              </a:defRPr>
+            </a:pPr>
+            <a:r>
+              <a:t>P5</a:t>
+            </a:r>
+          </a:p>
+        </p:txBody>
+      </p:sp>
+      <p:sp>
+        <p:nvSpPr>
+          <p:cNvPr id="29" name="TextBox 28"/>
+          <p:cNvSpPr txBox="1"/>
+          <p:nvPr/>
+        </p:nvSpPr>
+        <p:spPr>
+          <a:xfrm>
+            <a:off x="1371600" y="4297680"/>
+            <a:ext cx="10058400" cy="228600"/>
+          </a:xfrm>
+          <a:prstGeom prst="rect">
+            <a:avLst/>
+          </a:prstGeom>
+          <a:noFill/>
+        </p:spPr>
+        <p:txBody>
+          <a:bodyPr wrap="square">
+            <a:spAutoFit/>
+          </a:bodyPr>
+          <a:lstStyle/>
+          <a:p>
+            <a:pPr algn="l">
+              <a:defRPr sz="1000" b="0">
+                <a:solidFill>
+                  <a:srgbClr val="666666"/>
+                </a:solidFill>
+                <a:latin typeface="Consolas"/>
+              </a:defRPr>
+            </a:pPr>
+            <a:r>
+              <a:t>W1          W4          W8          W12         W16         W20         W26</a:t>
+            </a:r>
+          </a:p>
+        </p:txBody>
+      </p:sp>
+      <p:sp>
+        <p:nvSpPr>
+          <p:cNvPr id="30" name="TextBox 29"/>
+          <p:cNvSpPr txBox="1"/>
+          <p:nvPr/>
+        </p:nvSpPr>
+        <p:spPr>
+          <a:xfrm>
+            <a:off x="731520" y="4663440"/>
+            <a:ext cx="4572000" cy="274320"/>
+          </a:xfrm>
+          <a:prstGeom prst="rect">
+            <a:avLst/>
+          </a:prstGeom>
+          <a:noFill/>
+        </p:spPr>
+        <p:txBody>
+          <a:bodyPr wrap="square">
+            <a:spAutoFit/>
+          </a:bodyPr>
+          <a:lstStyle/>
+          <a:p>
+            <a:pPr algn="l">
+              <a:defRPr sz="1400" b="1">
+                <a:solidFill>
+                  <a:srgbClr val="0096D6"/>
+                </a:solidFill>
+                <a:latin typeface="맑은 고딕"/>
+              </a:defRPr>
+            </a:pPr>
+            <a:r>
+              <a:t>📋 단계별 주요 작업</a:t>
+            </a:r>
+          </a:p>
+        </p:txBody>
+      </p:sp>
+      <p:sp>
+        <p:nvSpPr>
+          <p:cNvPr id="31" name="TextBox 30"/>
+          <p:cNvSpPr txBox="1"/>
+          <p:nvPr/>
+        </p:nvSpPr>
+        <p:spPr>
+          <a:xfrm>
+            <a:off x="914400" y="5029200"/>
+            <a:ext cx="2286000" cy="274320"/>
           </a:xfrm>
           <a:prstGeom prst="rect">
             <a:avLst/>
@@ -7603,57 +8516,21 @@
               </a:defRPr>
             </a:pPr>
             <a:r>
-              <a:t>Phase 1</a:t>
-            </a:r>
-          </a:p>
-        </p:txBody>
-      </p:sp>
-      <p:sp>
-        <p:nvSpPr>
-          <p:cNvPr id="8" name="TextBox 7"/>
-          <p:cNvSpPr txBox="1"/>
-          <p:nvPr/>
-        </p:nvSpPr>
-        <p:spPr>
-          <a:xfrm>
-            <a:off x="914400" y="2103120"/>
-            <a:ext cx="2194560" cy="274320"/>
-          </a:xfrm>
-          <a:prstGeom prst="rect">
-            <a:avLst/>
-          </a:prstGeom>
-          <a:noFill/>
-        </p:spPr>
-        <p:txBody>
-          <a:bodyPr wrap="square">
-            <a:spAutoFit/>
-          </a:bodyPr>
-          <a:lstStyle/>
-          <a:p>
-            <a:pPr algn="l">
-              <a:defRPr sz="1800" b="1">
-                <a:solidFill>
-                  <a:srgbClr val="FFFFFF"/>
-                </a:solidFill>
-                <a:latin typeface="맑은 고딕"/>
-              </a:defRPr>
-            </a:pPr>
-            <a:r>
-              <a:t>기초 설계</a:t>
-            </a:r>
-          </a:p>
-        </p:txBody>
-      </p:sp>
-      <p:sp>
-        <p:nvSpPr>
-          <p:cNvPr id="9" name="TextBox 8"/>
-          <p:cNvSpPr txBox="1"/>
-          <p:nvPr/>
-        </p:nvSpPr>
-        <p:spPr>
-          <a:xfrm>
-            <a:off x="914400" y="2468880"/>
-            <a:ext cx="2194560" cy="274320"/>
+              <a:t>P1 설계+소싱</a:t>
+            </a:r>
+          </a:p>
+        </p:txBody>
+      </p:sp>
+      <p:sp>
+        <p:nvSpPr>
+          <p:cNvPr id="32" name="TextBox 31"/>
+          <p:cNvSpPr txBox="1"/>
+          <p:nvPr/>
+        </p:nvSpPr>
+        <p:spPr>
+          <a:xfrm>
+            <a:off x="3474720" y="5029200"/>
+            <a:ext cx="7772400" cy="274320"/>
           </a:xfrm>
           <a:prstGeom prst="rect">
             <a:avLst/>
@@ -7669,27 +8546,315 @@
             <a:pPr algn="l">
               <a:defRPr sz="1200" b="0">
                 <a:solidFill>
-                  <a:srgbClr val="666666"/>
-                </a:solidFill>
-                <a:latin typeface="맑은 고딕"/>
-              </a:defRPr>
-            </a:pPr>
-            <a:r>
-              <a:t>0~6개월</a:t>
-            </a:r>
-          </a:p>
-        </p:txBody>
-      </p:sp>
-      <p:sp>
-        <p:nvSpPr>
-          <p:cNvPr id="10" name="Rectangle 9"/>
+                  <a:srgbClr val="E0E0E0"/>
+                </a:solidFill>
+                <a:latin typeface="맑은 고딕"/>
+              </a:defRPr>
+            </a:pPr>
+            <a:r>
+              <a:t>양팔 마운트 설계, 섀시 보강, 부품 발주</a:t>
+            </a:r>
+          </a:p>
+        </p:txBody>
+      </p:sp>
+      <p:sp>
+        <p:nvSpPr>
+          <p:cNvPr id="33" name="TextBox 32"/>
+          <p:cNvSpPr txBox="1"/>
+          <p:nvPr/>
+        </p:nvSpPr>
+        <p:spPr>
+          <a:xfrm>
+            <a:off x="914400" y="5376672"/>
+            <a:ext cx="2286000" cy="274320"/>
+          </a:xfrm>
+          <a:prstGeom prst="rect">
+            <a:avLst/>
+          </a:prstGeom>
+          <a:noFill/>
+        </p:spPr>
+        <p:txBody>
+          <a:bodyPr wrap="square">
+            <a:spAutoFit/>
+          </a:bodyPr>
+          <a:lstStyle/>
+          <a:p>
+            <a:pPr algn="l">
+              <a:defRPr sz="1200" b="1">
+                <a:solidFill>
+                  <a:srgbClr val="FF8C00"/>
+                </a:solidFill>
+                <a:latin typeface="맑은 고딕"/>
+              </a:defRPr>
+            </a:pPr>
+            <a:r>
+              <a:t>P2 HW통합</a:t>
+            </a:r>
+          </a:p>
+        </p:txBody>
+      </p:sp>
+      <p:sp>
+        <p:nvSpPr>
+          <p:cNvPr id="34" name="TextBox 33"/>
+          <p:cNvSpPr txBox="1"/>
+          <p:nvPr/>
+        </p:nvSpPr>
+        <p:spPr>
+          <a:xfrm>
+            <a:off x="3474720" y="5376672"/>
+            <a:ext cx="7772400" cy="274320"/>
+          </a:xfrm>
+          <a:prstGeom prst="rect">
+            <a:avLst/>
+          </a:prstGeom>
+          <a:noFill/>
+        </p:spPr>
+        <p:txBody>
+          <a:bodyPr wrap="square">
+            <a:spAutoFit/>
+          </a:bodyPr>
+          <a:lstStyle/>
+          <a:p>
+            <a:pPr algn="l">
+              <a:defRPr sz="1200" b="0">
+                <a:solidFill>
+                  <a:srgbClr val="E0E0E0"/>
+                </a:solidFill>
+                <a:latin typeface="맑은 고딕"/>
+              </a:defRPr>
+            </a:pPr>
+            <a:r>
+              <a:t>AMR 보강, 양팔 마운트, 센서/BMS 장착</a:t>
+            </a:r>
+          </a:p>
+        </p:txBody>
+      </p:sp>
+      <p:sp>
+        <p:nvSpPr>
+          <p:cNvPr id="35" name="TextBox 34"/>
+          <p:cNvSpPr txBox="1"/>
+          <p:nvPr/>
+        </p:nvSpPr>
+        <p:spPr>
+          <a:xfrm>
+            <a:off x="914400" y="5724144"/>
+            <a:ext cx="2286000" cy="274320"/>
+          </a:xfrm>
+          <a:prstGeom prst="rect">
+            <a:avLst/>
+          </a:prstGeom>
+          <a:noFill/>
+        </p:spPr>
+        <p:txBody>
+          <a:bodyPr wrap="square">
+            <a:spAutoFit/>
+          </a:bodyPr>
+          <a:lstStyle/>
+          <a:p>
+            <a:pPr algn="l">
+              <a:defRPr sz="1200" b="1">
+                <a:solidFill>
+                  <a:srgbClr val="00C853"/>
+                </a:solidFill>
+                <a:latin typeface="맑은 고딕"/>
+              </a:defRPr>
+            </a:pPr>
+            <a:r>
+              <a:t>P3 SW통합</a:t>
+            </a:r>
+          </a:p>
+        </p:txBody>
+      </p:sp>
+      <p:sp>
+        <p:nvSpPr>
+          <p:cNvPr id="36" name="TextBox 35"/>
+          <p:cNvSpPr txBox="1"/>
+          <p:nvPr/>
+        </p:nvSpPr>
+        <p:spPr>
+          <a:xfrm>
+            <a:off x="3474720" y="5724144"/>
+            <a:ext cx="7772400" cy="274320"/>
+          </a:xfrm>
+          <a:prstGeom prst="rect">
+            <a:avLst/>
+          </a:prstGeom>
+          <a:noFill/>
+        </p:spPr>
+        <p:txBody>
+          <a:bodyPr wrap="square">
+            <a:spAutoFit/>
+          </a:bodyPr>
+          <a:lstStyle/>
+          <a:p>
+            <a:pPr algn="l">
+              <a:defRPr sz="1200" b="0">
+                <a:solidFill>
+                  <a:srgbClr val="E0E0E0"/>
+                </a:solidFill>
+                <a:latin typeface="맑은 고딕"/>
+              </a:defRPr>
+            </a:pPr>
+            <a:r>
+              <a:t>양팔 드라이버, MoveIt 2, 협동작업, Fleet 연동</a:t>
+            </a:r>
+          </a:p>
+        </p:txBody>
+      </p:sp>
+      <p:sp>
+        <p:nvSpPr>
+          <p:cNvPr id="37" name="TextBox 36"/>
+          <p:cNvSpPr txBox="1"/>
+          <p:nvPr/>
+        </p:nvSpPr>
+        <p:spPr>
+          <a:xfrm>
+            <a:off x="914400" y="6071616"/>
+            <a:ext cx="2286000" cy="274320"/>
+          </a:xfrm>
+          <a:prstGeom prst="rect">
+            <a:avLst/>
+          </a:prstGeom>
+          <a:noFill/>
+        </p:spPr>
+        <p:txBody>
+          <a:bodyPr wrap="square">
+            <a:spAutoFit/>
+          </a:bodyPr>
+          <a:lstStyle/>
+          <a:p>
+            <a:pPr algn="l">
+              <a:defRPr sz="1200" b="1">
+                <a:solidFill>
+                  <a:srgbClr val="FFD600"/>
+                </a:solidFill>
+                <a:latin typeface="맑은 고딕"/>
+              </a:defRPr>
+            </a:pPr>
+            <a:r>
+              <a:t>P4 테스트</a:t>
+            </a:r>
+          </a:p>
+        </p:txBody>
+      </p:sp>
+      <p:sp>
+        <p:nvSpPr>
+          <p:cNvPr id="38" name="TextBox 37"/>
+          <p:cNvSpPr txBox="1"/>
+          <p:nvPr/>
+        </p:nvSpPr>
+        <p:spPr>
+          <a:xfrm>
+            <a:off x="3474720" y="6071616"/>
+            <a:ext cx="7772400" cy="274320"/>
+          </a:xfrm>
+          <a:prstGeom prst="rect">
+            <a:avLst/>
+          </a:prstGeom>
+          <a:noFill/>
+        </p:spPr>
+        <p:txBody>
+          <a:bodyPr wrap="square">
+            <a:spAutoFit/>
+          </a:bodyPr>
+          <a:lstStyle/>
+          <a:p>
+            <a:pPr algn="l">
+              <a:defRPr sz="1200" b="0">
+                <a:solidFill>
+                  <a:srgbClr val="E0E0E0"/>
+                </a:solidFill>
+                <a:latin typeface="맑은 고딕"/>
+              </a:defRPr>
+            </a:pPr>
+            <a:r>
+              <a:t>성능/안전/통합/하중 검증, 파일럿</a:t>
+            </a:r>
+          </a:p>
+        </p:txBody>
+      </p:sp>
+      <p:sp>
+        <p:nvSpPr>
+          <p:cNvPr id="39" name="TextBox 38"/>
+          <p:cNvSpPr txBox="1"/>
+          <p:nvPr/>
+        </p:nvSpPr>
+        <p:spPr>
+          <a:xfrm>
+            <a:off x="914400" y="6419088"/>
+            <a:ext cx="2286000" cy="274320"/>
+          </a:xfrm>
+          <a:prstGeom prst="rect">
+            <a:avLst/>
+          </a:prstGeom>
+          <a:noFill/>
+        </p:spPr>
+        <p:txBody>
+          <a:bodyPr wrap="square">
+            <a:spAutoFit/>
+          </a:bodyPr>
+          <a:lstStyle/>
+          <a:p>
+            <a:pPr algn="l">
+              <a:defRPr sz="1200" b="1">
+                <a:solidFill>
+                  <a:srgbClr val="FF4545"/>
+                </a:solidFill>
+                <a:latin typeface="맑은 고딕"/>
+              </a:defRPr>
+            </a:pPr>
+            <a:r>
+              <a:t>P5 데모</a:t>
+            </a:r>
+          </a:p>
+        </p:txBody>
+      </p:sp>
+      <p:sp>
+        <p:nvSpPr>
+          <p:cNvPr id="40" name="TextBox 39"/>
+          <p:cNvSpPr txBox="1"/>
+          <p:nvPr/>
+        </p:nvSpPr>
+        <p:spPr>
+          <a:xfrm>
+            <a:off x="3474720" y="6419088"/>
+            <a:ext cx="7772400" cy="274320"/>
+          </a:xfrm>
+          <a:prstGeom prst="rect">
+            <a:avLst/>
+          </a:prstGeom>
+          <a:noFill/>
+        </p:spPr>
+        <p:txBody>
+          <a:bodyPr wrap="square">
+            <a:spAutoFit/>
+          </a:bodyPr>
+          <a:lstStyle/>
+          <a:p>
+            <a:pPr algn="l">
+              <a:defRPr sz="1200" b="0">
+                <a:solidFill>
+                  <a:srgbClr val="E0E0E0"/>
+                </a:solidFill>
+                <a:latin typeface="맑은 고딕"/>
+              </a:defRPr>
+            </a:pPr>
+            <a:r>
+              <a:t>데모 제작, 인증 준비, 고객 피드백</a:t>
+            </a:r>
+          </a:p>
+        </p:txBody>
+      </p:sp>
+      <p:sp>
+        <p:nvSpPr>
+          <p:cNvPr id="41" name="Rectangle 40"/>
           <p:cNvSpPr/>
           <p:nvPr/>
         </p:nvSpPr>
         <p:spPr>
           <a:xfrm>
-            <a:off x="914400" y="2834640"/>
-            <a:ext cx="2194560" cy="38100"/>
+            <a:off x="731520" y="6400800"/>
+            <a:ext cx="10515600" cy="274320"/>
           </a:xfrm>
           <a:prstGeom prst="rect">
             <a:avLst/>
@@ -7725,1337 +8890,7 @@
       </p:sp>
       <p:sp>
         <p:nvSpPr>
-          <p:cNvPr id="11" name="TextBox 10"/>
-          <p:cNvSpPr txBox="1"/>
-          <p:nvPr/>
-        </p:nvSpPr>
-        <p:spPr>
-          <a:xfrm>
-            <a:off x="960120" y="3017520"/>
-            <a:ext cx="2103120" cy="320040"/>
-          </a:xfrm>
-          <a:prstGeom prst="rect">
-            <a:avLst/>
-          </a:prstGeom>
-          <a:noFill/>
-        </p:spPr>
-        <p:txBody>
-          <a:bodyPr wrap="square">
-            <a:spAutoFit/>
-          </a:bodyPr>
-          <a:lstStyle/>
-          <a:p>
-            <a:pPr algn="l">
-              <a:defRPr sz="1200" b="0">
-                <a:solidFill>
-                  <a:srgbClr val="E0E0E0"/>
-                </a:solidFill>
-                <a:latin typeface="맑은 고딕"/>
-              </a:defRPr>
-            </a:pPr>
-            <a:r>
-              <a:t>▸ 상세 기계/전기 설계</a:t>
-            </a:r>
-          </a:p>
-        </p:txBody>
-      </p:sp>
-      <p:sp>
-        <p:nvSpPr>
-          <p:cNvPr id="12" name="TextBox 11"/>
-          <p:cNvSpPr txBox="1"/>
-          <p:nvPr/>
-        </p:nvSpPr>
-        <p:spPr>
-          <a:xfrm>
-            <a:off x="960120" y="3383280"/>
-            <a:ext cx="2103120" cy="320040"/>
-          </a:xfrm>
-          <a:prstGeom prst="rect">
-            <a:avLst/>
-          </a:prstGeom>
-          <a:noFill/>
-        </p:spPr>
-        <p:txBody>
-          <a:bodyPr wrap="square">
-            <a:spAutoFit/>
-          </a:bodyPr>
-          <a:lstStyle/>
-          <a:p>
-            <a:pPr algn="l">
-              <a:defRPr sz="1200" b="0">
-                <a:solidFill>
-                  <a:srgbClr val="E0E0E0"/>
-                </a:solidFill>
-                <a:latin typeface="맑은 고딕"/>
-              </a:defRPr>
-            </a:pPr>
-            <a:r>
-              <a:t>▸ SW 아키텍처 확정</a:t>
-            </a:r>
-          </a:p>
-        </p:txBody>
-      </p:sp>
-      <p:sp>
-        <p:nvSpPr>
-          <p:cNvPr id="13" name="TextBox 12"/>
-          <p:cNvSpPr txBox="1"/>
-          <p:nvPr/>
-        </p:nvSpPr>
-        <p:spPr>
-          <a:xfrm>
-            <a:off x="960120" y="3749040"/>
-            <a:ext cx="2103120" cy="320040"/>
-          </a:xfrm>
-          <a:prstGeom prst="rect">
-            <a:avLst/>
-          </a:prstGeom>
-          <a:noFill/>
-        </p:spPr>
-        <p:txBody>
-          <a:bodyPr wrap="square">
-            <a:spAutoFit/>
-          </a:bodyPr>
-          <a:lstStyle/>
-          <a:p>
-            <a:pPr algn="l">
-              <a:defRPr sz="1200" b="0">
-                <a:solidFill>
-                  <a:srgbClr val="E0E0E0"/>
-                </a:solidFill>
-                <a:latin typeface="맑은 고딕"/>
-              </a:defRPr>
-            </a:pPr>
-            <a:r>
-              <a:t>▸ 핵심 부품 선정</a:t>
-            </a:r>
-          </a:p>
-        </p:txBody>
-      </p:sp>
-      <p:sp>
-        <p:nvSpPr>
-          <p:cNvPr id="14" name="TextBox 13"/>
-          <p:cNvSpPr txBox="1"/>
-          <p:nvPr/>
-        </p:nvSpPr>
-        <p:spPr>
-          <a:xfrm>
-            <a:off x="960120" y="4114800"/>
-            <a:ext cx="2103120" cy="320040"/>
-          </a:xfrm>
-          <a:prstGeom prst="rect">
-            <a:avLst/>
-          </a:prstGeom>
-          <a:noFill/>
-        </p:spPr>
-        <p:txBody>
-          <a:bodyPr wrap="square">
-            <a:spAutoFit/>
-          </a:bodyPr>
-          <a:lstStyle/>
-          <a:p>
-            <a:pPr algn="l">
-              <a:defRPr sz="1200" b="0">
-                <a:solidFill>
-                  <a:srgbClr val="E0E0E0"/>
-                </a:solidFill>
-                <a:latin typeface="맑은 고딕"/>
-              </a:defRPr>
-            </a:pPr>
-            <a:r>
-              <a:t>▸ 시뮬레이터 구축</a:t>
-            </a:r>
-          </a:p>
-        </p:txBody>
-      </p:sp>
-      <p:sp>
-        <p:nvSpPr>
-          <p:cNvPr id="15" name="Rectangle 14"/>
-          <p:cNvSpPr/>
-          <p:nvPr/>
-        </p:nvSpPr>
-        <p:spPr>
-          <a:xfrm>
-            <a:off x="3566160" y="1645920"/>
-            <a:ext cx="2560320" cy="4572000"/>
-          </a:xfrm>
-          <a:prstGeom prst="rect">
-            <a:avLst/>
-          </a:prstGeom>
-          <a:solidFill>
-            <a:srgbClr val="252540"/>
-          </a:solidFill>
-          <a:ln>
-            <a:noFill/>
-          </a:ln>
-        </p:spPr>
-        <p:style>
-          <a:lnRef idx="1">
-            <a:schemeClr val="accent1"/>
-          </a:lnRef>
-          <a:fillRef idx="3">
-            <a:schemeClr val="accent1"/>
-          </a:fillRef>
-          <a:effectRef idx="2">
-            <a:schemeClr val="accent1"/>
-          </a:effectRef>
-          <a:fontRef idx="minor">
-            <a:schemeClr val="lt1"/>
-          </a:fontRef>
-        </p:style>
-        <p:txBody>
-          <a:bodyPr rtlCol="0" anchor="ctr"/>
-          <a:lstStyle/>
-          <a:p>
-            <a:pPr algn="ctr"/>
-          </a:p>
-        </p:txBody>
-      </p:sp>
-      <p:sp>
-        <p:nvSpPr>
-          <p:cNvPr id="16" name="Rectangle 15"/>
-          <p:cNvSpPr/>
-          <p:nvPr/>
-        </p:nvSpPr>
-        <p:spPr>
-          <a:xfrm>
-            <a:off x="3566160" y="1645920"/>
-            <a:ext cx="2560320" cy="63500"/>
-          </a:xfrm>
-          <a:prstGeom prst="rect">
-            <a:avLst/>
-          </a:prstGeom>
-          <a:solidFill>
-            <a:srgbClr val="FF8C00"/>
-          </a:solidFill>
-          <a:ln>
-            <a:noFill/>
-          </a:ln>
-        </p:spPr>
-        <p:style>
-          <a:lnRef idx="1">
-            <a:schemeClr val="accent1"/>
-          </a:lnRef>
-          <a:fillRef idx="3">
-            <a:schemeClr val="accent1"/>
-          </a:fillRef>
-          <a:effectRef idx="2">
-            <a:schemeClr val="accent1"/>
-          </a:effectRef>
-          <a:fontRef idx="minor">
-            <a:schemeClr val="lt1"/>
-          </a:fontRef>
-        </p:style>
-        <p:txBody>
-          <a:bodyPr rtlCol="0" anchor="ctr"/>
-          <a:lstStyle/>
-          <a:p>
-            <a:pPr algn="ctr"/>
-          </a:p>
-        </p:txBody>
-      </p:sp>
-      <p:sp>
-        <p:nvSpPr>
-          <p:cNvPr id="17" name="TextBox 16"/>
-          <p:cNvSpPr txBox="1"/>
-          <p:nvPr/>
-        </p:nvSpPr>
-        <p:spPr>
-          <a:xfrm>
-            <a:off x="3749040" y="1828800"/>
-            <a:ext cx="2194560" cy="274320"/>
-          </a:xfrm>
-          <a:prstGeom prst="rect">
-            <a:avLst/>
-          </a:prstGeom>
-          <a:noFill/>
-        </p:spPr>
-        <p:txBody>
-          <a:bodyPr wrap="square">
-            <a:spAutoFit/>
-          </a:bodyPr>
-          <a:lstStyle/>
-          <a:p>
-            <a:pPr algn="l">
-              <a:defRPr sz="1200" b="1">
-                <a:solidFill>
-                  <a:srgbClr val="FF8C00"/>
-                </a:solidFill>
-                <a:latin typeface="맑은 고딕"/>
-              </a:defRPr>
-            </a:pPr>
-            <a:r>
-              <a:t>Phase 2</a:t>
-            </a:r>
-          </a:p>
-        </p:txBody>
-      </p:sp>
-      <p:sp>
-        <p:nvSpPr>
-          <p:cNvPr id="18" name="TextBox 17"/>
-          <p:cNvSpPr txBox="1"/>
-          <p:nvPr/>
-        </p:nvSpPr>
-        <p:spPr>
-          <a:xfrm>
-            <a:off x="3749040" y="2103120"/>
-            <a:ext cx="2194560" cy="274320"/>
-          </a:xfrm>
-          <a:prstGeom prst="rect">
-            <a:avLst/>
-          </a:prstGeom>
-          <a:noFill/>
-        </p:spPr>
-        <p:txBody>
-          <a:bodyPr wrap="square">
-            <a:spAutoFit/>
-          </a:bodyPr>
-          <a:lstStyle/>
-          <a:p>
-            <a:pPr algn="l">
-              <a:defRPr sz="1800" b="1">
-                <a:solidFill>
-                  <a:srgbClr val="FFFFFF"/>
-                </a:solidFill>
-                <a:latin typeface="맑은 고딕"/>
-              </a:defRPr>
-            </a:pPr>
-            <a:r>
-              <a:t>프로토타입</a:t>
-            </a:r>
-          </a:p>
-        </p:txBody>
-      </p:sp>
-      <p:sp>
-        <p:nvSpPr>
-          <p:cNvPr id="19" name="TextBox 18"/>
-          <p:cNvSpPr txBox="1"/>
-          <p:nvPr/>
-        </p:nvSpPr>
-        <p:spPr>
-          <a:xfrm>
-            <a:off x="3749040" y="2468880"/>
-            <a:ext cx="2194560" cy="274320"/>
-          </a:xfrm>
-          <a:prstGeom prst="rect">
-            <a:avLst/>
-          </a:prstGeom>
-          <a:noFill/>
-        </p:spPr>
-        <p:txBody>
-          <a:bodyPr wrap="square">
-            <a:spAutoFit/>
-          </a:bodyPr>
-          <a:lstStyle/>
-          <a:p>
-            <a:pPr algn="l">
-              <a:defRPr sz="1200" b="0">
-                <a:solidFill>
-                  <a:srgbClr val="666666"/>
-                </a:solidFill>
-                <a:latin typeface="맑은 고딕"/>
-              </a:defRPr>
-            </a:pPr>
-            <a:r>
-              <a:t>6~12개월</a:t>
-            </a:r>
-          </a:p>
-        </p:txBody>
-      </p:sp>
-      <p:sp>
-        <p:nvSpPr>
-          <p:cNvPr id="20" name="Rectangle 19"/>
-          <p:cNvSpPr/>
-          <p:nvPr/>
-        </p:nvSpPr>
-        <p:spPr>
-          <a:xfrm>
-            <a:off x="3749040" y="2834640"/>
-            <a:ext cx="2194560" cy="38100"/>
-          </a:xfrm>
-          <a:prstGeom prst="rect">
-            <a:avLst/>
-          </a:prstGeom>
-          <a:solidFill>
-            <a:srgbClr val="0096D6"/>
-          </a:solidFill>
-          <a:ln>
-            <a:noFill/>
-          </a:ln>
-        </p:spPr>
-        <p:style>
-          <a:lnRef idx="1">
-            <a:schemeClr val="accent1"/>
-          </a:lnRef>
-          <a:fillRef idx="3">
-            <a:schemeClr val="accent1"/>
-          </a:fillRef>
-          <a:effectRef idx="2">
-            <a:schemeClr val="accent1"/>
-          </a:effectRef>
-          <a:fontRef idx="minor">
-            <a:schemeClr val="lt1"/>
-          </a:fontRef>
-        </p:style>
-        <p:txBody>
-          <a:bodyPr rtlCol="0" anchor="ctr"/>
-          <a:lstStyle/>
-          <a:p>
-            <a:pPr algn="ctr"/>
-          </a:p>
-        </p:txBody>
-      </p:sp>
-      <p:sp>
-        <p:nvSpPr>
-          <p:cNvPr id="21" name="TextBox 20"/>
-          <p:cNvSpPr txBox="1"/>
-          <p:nvPr/>
-        </p:nvSpPr>
-        <p:spPr>
-          <a:xfrm>
-            <a:off x="3794760" y="3017520"/>
-            <a:ext cx="2103120" cy="320040"/>
-          </a:xfrm>
-          <a:prstGeom prst="rect">
-            <a:avLst/>
-          </a:prstGeom>
-          <a:noFill/>
-        </p:spPr>
-        <p:txBody>
-          <a:bodyPr wrap="square">
-            <a:spAutoFit/>
-          </a:bodyPr>
-          <a:lstStyle/>
-          <a:p>
-            <a:pPr algn="l">
-              <a:defRPr sz="1200" b="0">
-                <a:solidFill>
-                  <a:srgbClr val="E0E0E0"/>
-                </a:solidFill>
-                <a:latin typeface="맑은 고딕"/>
-              </a:defRPr>
-            </a:pPr>
-            <a:r>
-              <a:t>▸ AMR 플랫폼 제작</a:t>
-            </a:r>
-          </a:p>
-        </p:txBody>
-      </p:sp>
-      <p:sp>
-        <p:nvSpPr>
-          <p:cNvPr id="22" name="TextBox 21"/>
-          <p:cNvSpPr txBox="1"/>
-          <p:nvPr/>
-        </p:nvSpPr>
-        <p:spPr>
-          <a:xfrm>
-            <a:off x="3794760" y="3383280"/>
-            <a:ext cx="2103120" cy="320040"/>
-          </a:xfrm>
-          <a:prstGeom prst="rect">
-            <a:avLst/>
-          </a:prstGeom>
-          <a:noFill/>
-        </p:spPr>
-        <p:txBody>
-          <a:bodyPr wrap="square">
-            <a:spAutoFit/>
-          </a:bodyPr>
-          <a:lstStyle/>
-          <a:p>
-            <a:pPr algn="l">
-              <a:defRPr sz="1200" b="0">
-                <a:solidFill>
-                  <a:srgbClr val="E0E0E0"/>
-                </a:solidFill>
-                <a:latin typeface="맑은 고딕"/>
-              </a:defRPr>
-            </a:pPr>
-            <a:r>
-              <a:t>▸ 양팔 통합 &amp; 캘리브레이션</a:t>
-            </a:r>
-          </a:p>
-        </p:txBody>
-      </p:sp>
-      <p:sp>
-        <p:nvSpPr>
-          <p:cNvPr id="23" name="TextBox 22"/>
-          <p:cNvSpPr txBox="1"/>
-          <p:nvPr/>
-        </p:nvSpPr>
-        <p:spPr>
-          <a:xfrm>
-            <a:off x="3794760" y="3749040"/>
-            <a:ext cx="2103120" cy="320040"/>
-          </a:xfrm>
-          <a:prstGeom prst="rect">
-            <a:avLst/>
-          </a:prstGeom>
-          <a:noFill/>
-        </p:spPr>
-        <p:txBody>
-          <a:bodyPr wrap="square">
-            <a:spAutoFit/>
-          </a:bodyPr>
-          <a:lstStyle/>
-          <a:p>
-            <a:pPr algn="l">
-              <a:defRPr sz="1200" b="0">
-                <a:solidFill>
-                  <a:srgbClr val="E0E0E0"/>
-                </a:solidFill>
-                <a:latin typeface="맑은 고딕"/>
-              </a:defRPr>
-            </a:pPr>
-            <a:r>
-              <a:t>▸ 자율주행 구현</a:t>
-            </a:r>
-          </a:p>
-        </p:txBody>
-      </p:sp>
-      <p:sp>
-        <p:nvSpPr>
-          <p:cNvPr id="24" name="TextBox 23"/>
-          <p:cNvSpPr txBox="1"/>
-          <p:nvPr/>
-        </p:nvSpPr>
-        <p:spPr>
-          <a:xfrm>
-            <a:off x="3794760" y="4114800"/>
-            <a:ext cx="2103120" cy="320040"/>
-          </a:xfrm>
-          <a:prstGeom prst="rect">
-            <a:avLst/>
-          </a:prstGeom>
-          <a:noFill/>
-        </p:spPr>
-        <p:txBody>
-          <a:bodyPr wrap="square">
-            <a:spAutoFit/>
-          </a:bodyPr>
-          <a:lstStyle/>
-          <a:p>
-            <a:pPr algn="l">
-              <a:defRPr sz="1200" b="0">
-                <a:solidFill>
-                  <a:srgbClr val="E0E0E0"/>
-                </a:solidFill>
-                <a:latin typeface="맑은 고딕"/>
-              </a:defRPr>
-            </a:pPr>
-            <a:r>
-              <a:t>▸ 안전 시스템 1차 검증</a:t>
-            </a:r>
-          </a:p>
-        </p:txBody>
-      </p:sp>
-      <p:sp>
-        <p:nvSpPr>
-          <p:cNvPr id="25" name="Rectangle 24"/>
-          <p:cNvSpPr/>
-          <p:nvPr/>
-        </p:nvSpPr>
-        <p:spPr>
-          <a:xfrm>
-            <a:off x="6400800" y="1645920"/>
-            <a:ext cx="2560320" cy="4572000"/>
-          </a:xfrm>
-          <a:prstGeom prst="rect">
-            <a:avLst/>
-          </a:prstGeom>
-          <a:solidFill>
-            <a:srgbClr val="252540"/>
-          </a:solidFill>
-          <a:ln>
-            <a:noFill/>
-          </a:ln>
-        </p:spPr>
-        <p:style>
-          <a:lnRef idx="1">
-            <a:schemeClr val="accent1"/>
-          </a:lnRef>
-          <a:fillRef idx="3">
-            <a:schemeClr val="accent1"/>
-          </a:fillRef>
-          <a:effectRef idx="2">
-            <a:schemeClr val="accent1"/>
-          </a:effectRef>
-          <a:fontRef idx="minor">
-            <a:schemeClr val="lt1"/>
-          </a:fontRef>
-        </p:style>
-        <p:txBody>
-          <a:bodyPr rtlCol="0" anchor="ctr"/>
-          <a:lstStyle/>
-          <a:p>
-            <a:pPr algn="ctr"/>
-          </a:p>
-        </p:txBody>
-      </p:sp>
-      <p:sp>
-        <p:nvSpPr>
-          <p:cNvPr id="26" name="Rectangle 25"/>
-          <p:cNvSpPr/>
-          <p:nvPr/>
-        </p:nvSpPr>
-        <p:spPr>
-          <a:xfrm>
-            <a:off x="6400800" y="1645920"/>
-            <a:ext cx="2560320" cy="63500"/>
-          </a:xfrm>
-          <a:prstGeom prst="rect">
-            <a:avLst/>
-          </a:prstGeom>
-          <a:solidFill>
-            <a:srgbClr val="00C853"/>
-          </a:solidFill>
-          <a:ln>
-            <a:noFill/>
-          </a:ln>
-        </p:spPr>
-        <p:style>
-          <a:lnRef idx="1">
-            <a:schemeClr val="accent1"/>
-          </a:lnRef>
-          <a:fillRef idx="3">
-            <a:schemeClr val="accent1"/>
-          </a:fillRef>
-          <a:effectRef idx="2">
-            <a:schemeClr val="accent1"/>
-          </a:effectRef>
-          <a:fontRef idx="minor">
-            <a:schemeClr val="lt1"/>
-          </a:fontRef>
-        </p:style>
-        <p:txBody>
-          <a:bodyPr rtlCol="0" anchor="ctr"/>
-          <a:lstStyle/>
-          <a:p>
-            <a:pPr algn="ctr"/>
-          </a:p>
-        </p:txBody>
-      </p:sp>
-      <p:sp>
-        <p:nvSpPr>
-          <p:cNvPr id="27" name="TextBox 26"/>
-          <p:cNvSpPr txBox="1"/>
-          <p:nvPr/>
-        </p:nvSpPr>
-        <p:spPr>
-          <a:xfrm>
-            <a:off x="6583680" y="1828800"/>
-            <a:ext cx="2194560" cy="274320"/>
-          </a:xfrm>
-          <a:prstGeom prst="rect">
-            <a:avLst/>
-          </a:prstGeom>
-          <a:noFill/>
-        </p:spPr>
-        <p:txBody>
-          <a:bodyPr wrap="square">
-            <a:spAutoFit/>
-          </a:bodyPr>
-          <a:lstStyle/>
-          <a:p>
-            <a:pPr algn="l">
-              <a:defRPr sz="1200" b="1">
-                <a:solidFill>
-                  <a:srgbClr val="00C853"/>
-                </a:solidFill>
-                <a:latin typeface="맑은 고딕"/>
-              </a:defRPr>
-            </a:pPr>
-            <a:r>
-              <a:t>Phase 3</a:t>
-            </a:r>
-          </a:p>
-        </p:txBody>
-      </p:sp>
-      <p:sp>
-        <p:nvSpPr>
-          <p:cNvPr id="28" name="TextBox 27"/>
-          <p:cNvSpPr txBox="1"/>
-          <p:nvPr/>
-        </p:nvSpPr>
-        <p:spPr>
-          <a:xfrm>
-            <a:off x="6583680" y="2103120"/>
-            <a:ext cx="2194560" cy="274320"/>
-          </a:xfrm>
-          <a:prstGeom prst="rect">
-            <a:avLst/>
-          </a:prstGeom>
-          <a:noFill/>
-        </p:spPr>
-        <p:txBody>
-          <a:bodyPr wrap="square">
-            <a:spAutoFit/>
-          </a:bodyPr>
-          <a:lstStyle/>
-          <a:p>
-            <a:pPr algn="l">
-              <a:defRPr sz="1800" b="1">
-                <a:solidFill>
-                  <a:srgbClr val="FFFFFF"/>
-                </a:solidFill>
-                <a:latin typeface="맑은 고딕"/>
-              </a:defRPr>
-            </a:pPr>
-            <a:r>
-              <a:t>시험·검증</a:t>
-            </a:r>
-          </a:p>
-        </p:txBody>
-      </p:sp>
-      <p:sp>
-        <p:nvSpPr>
-          <p:cNvPr id="29" name="TextBox 28"/>
-          <p:cNvSpPr txBox="1"/>
-          <p:nvPr/>
-        </p:nvSpPr>
-        <p:spPr>
-          <a:xfrm>
-            <a:off x="6583680" y="2468880"/>
-            <a:ext cx="2194560" cy="274320"/>
-          </a:xfrm>
-          <a:prstGeom prst="rect">
-            <a:avLst/>
-          </a:prstGeom>
-          <a:noFill/>
-        </p:spPr>
-        <p:txBody>
-          <a:bodyPr wrap="square">
-            <a:spAutoFit/>
-          </a:bodyPr>
-          <a:lstStyle/>
-          <a:p>
-            <a:pPr algn="l">
-              <a:defRPr sz="1200" b="0">
-                <a:solidFill>
-                  <a:srgbClr val="666666"/>
-                </a:solidFill>
-                <a:latin typeface="맑은 고딕"/>
-              </a:defRPr>
-            </a:pPr>
-            <a:r>
-              <a:t>12~18개월</a:t>
-            </a:r>
-          </a:p>
-        </p:txBody>
-      </p:sp>
-      <p:sp>
-        <p:nvSpPr>
-          <p:cNvPr id="30" name="Rectangle 29"/>
-          <p:cNvSpPr/>
-          <p:nvPr/>
-        </p:nvSpPr>
-        <p:spPr>
-          <a:xfrm>
-            <a:off x="6583680" y="2834640"/>
-            <a:ext cx="2194560" cy="38100"/>
-          </a:xfrm>
-          <a:prstGeom prst="rect">
-            <a:avLst/>
-          </a:prstGeom>
-          <a:solidFill>
-            <a:srgbClr val="0096D6"/>
-          </a:solidFill>
-          <a:ln>
-            <a:noFill/>
-          </a:ln>
-        </p:spPr>
-        <p:style>
-          <a:lnRef idx="1">
-            <a:schemeClr val="accent1"/>
-          </a:lnRef>
-          <a:fillRef idx="3">
-            <a:schemeClr val="accent1"/>
-          </a:fillRef>
-          <a:effectRef idx="2">
-            <a:schemeClr val="accent1"/>
-          </a:effectRef>
-          <a:fontRef idx="minor">
-            <a:schemeClr val="lt1"/>
-          </a:fontRef>
-        </p:style>
-        <p:txBody>
-          <a:bodyPr rtlCol="0" anchor="ctr"/>
-          <a:lstStyle/>
-          <a:p>
-            <a:pPr algn="ctr"/>
-          </a:p>
-        </p:txBody>
-      </p:sp>
-      <p:sp>
-        <p:nvSpPr>
-          <p:cNvPr id="31" name="TextBox 30"/>
-          <p:cNvSpPr txBox="1"/>
-          <p:nvPr/>
-        </p:nvSpPr>
-        <p:spPr>
-          <a:xfrm>
-            <a:off x="6629400" y="3017520"/>
-            <a:ext cx="2103120" cy="320040"/>
-          </a:xfrm>
-          <a:prstGeom prst="rect">
-            <a:avLst/>
-          </a:prstGeom>
-          <a:noFill/>
-        </p:spPr>
-        <p:txBody>
-          <a:bodyPr wrap="square">
-            <a:spAutoFit/>
-          </a:bodyPr>
-          <a:lstStyle/>
-          <a:p>
-            <a:pPr algn="l">
-              <a:defRPr sz="1200" b="0">
-                <a:solidFill>
-                  <a:srgbClr val="E0E0E0"/>
-                </a:solidFill>
-                <a:latin typeface="맑은 고딕"/>
-              </a:defRPr>
-            </a:pPr>
-            <a:r>
-              <a:t>▸ 통합 테스트</a:t>
-            </a:r>
-          </a:p>
-        </p:txBody>
-      </p:sp>
-      <p:sp>
-        <p:nvSpPr>
-          <p:cNvPr id="32" name="TextBox 31"/>
-          <p:cNvSpPr txBox="1"/>
-          <p:nvPr/>
-        </p:nvSpPr>
-        <p:spPr>
-          <a:xfrm>
-            <a:off x="6629400" y="3383280"/>
-            <a:ext cx="2103120" cy="320040"/>
-          </a:xfrm>
-          <a:prstGeom prst="rect">
-            <a:avLst/>
-          </a:prstGeom>
-          <a:noFill/>
-        </p:spPr>
-        <p:txBody>
-          <a:bodyPr wrap="square">
-            <a:spAutoFit/>
-          </a:bodyPr>
-          <a:lstStyle/>
-          <a:p>
-            <a:pPr algn="l">
-              <a:defRPr sz="1200" b="0">
-                <a:solidFill>
-                  <a:srgbClr val="E0E0E0"/>
-                </a:solidFill>
-                <a:latin typeface="맑은 고딕"/>
-              </a:defRPr>
-            </a:pPr>
-            <a:r>
-              <a:t>▸ 안전 인증 (ISO 3691-4)</a:t>
-            </a:r>
-          </a:p>
-        </p:txBody>
-      </p:sp>
-      <p:sp>
-        <p:nvSpPr>
-          <p:cNvPr id="33" name="TextBox 32"/>
-          <p:cNvSpPr txBox="1"/>
-          <p:nvPr/>
-        </p:nvSpPr>
-        <p:spPr>
-          <a:xfrm>
-            <a:off x="6629400" y="3749040"/>
-            <a:ext cx="2103120" cy="320040"/>
-          </a:xfrm>
-          <a:prstGeom prst="rect">
-            <a:avLst/>
-          </a:prstGeom>
-          <a:noFill/>
-        </p:spPr>
-        <p:txBody>
-          <a:bodyPr wrap="square">
-            <a:spAutoFit/>
-          </a:bodyPr>
-          <a:lstStyle/>
-          <a:p>
-            <a:pPr algn="l">
-              <a:defRPr sz="1200" b="0">
-                <a:solidFill>
-                  <a:srgbClr val="E0E0E0"/>
-                </a:solidFill>
-                <a:latin typeface="맑은 고딕"/>
-              </a:defRPr>
-            </a:pPr>
-            <a:r>
-              <a:t>▸ 현장 파일럿 테스트</a:t>
-            </a:r>
-          </a:p>
-        </p:txBody>
-      </p:sp>
-      <p:sp>
-        <p:nvSpPr>
-          <p:cNvPr id="34" name="TextBox 33"/>
-          <p:cNvSpPr txBox="1"/>
-          <p:nvPr/>
-        </p:nvSpPr>
-        <p:spPr>
-          <a:xfrm>
-            <a:off x="6629400" y="4114800"/>
-            <a:ext cx="2103120" cy="320040"/>
-          </a:xfrm>
-          <a:prstGeom prst="rect">
-            <a:avLst/>
-          </a:prstGeom>
-          <a:noFill/>
-        </p:spPr>
-        <p:txBody>
-          <a:bodyPr wrap="square">
-            <a:spAutoFit/>
-          </a:bodyPr>
-          <a:lstStyle/>
-          <a:p>
-            <a:pPr algn="l">
-              <a:defRPr sz="1200" b="0">
-                <a:solidFill>
-                  <a:srgbClr val="E0E0E0"/>
-                </a:solidFill>
-                <a:latin typeface="맑은 고딕"/>
-              </a:defRPr>
-            </a:pPr>
-            <a:r>
-              <a:t>▸ 성능 최적화</a:t>
-            </a:r>
-          </a:p>
-        </p:txBody>
-      </p:sp>
-      <p:sp>
-        <p:nvSpPr>
-          <p:cNvPr id="35" name="Rectangle 34"/>
-          <p:cNvSpPr/>
-          <p:nvPr/>
-        </p:nvSpPr>
-        <p:spPr>
-          <a:xfrm>
-            <a:off x="9235440" y="1645920"/>
-            <a:ext cx="2560320" cy="4572000"/>
-          </a:xfrm>
-          <a:prstGeom prst="rect">
-            <a:avLst/>
-          </a:prstGeom>
-          <a:solidFill>
-            <a:srgbClr val="252540"/>
-          </a:solidFill>
-          <a:ln>
-            <a:noFill/>
-          </a:ln>
-        </p:spPr>
-        <p:style>
-          <a:lnRef idx="1">
-            <a:schemeClr val="accent1"/>
-          </a:lnRef>
-          <a:fillRef idx="3">
-            <a:schemeClr val="accent1"/>
-          </a:fillRef>
-          <a:effectRef idx="2">
-            <a:schemeClr val="accent1"/>
-          </a:effectRef>
-          <a:fontRef idx="minor">
-            <a:schemeClr val="lt1"/>
-          </a:fontRef>
-        </p:style>
-        <p:txBody>
-          <a:bodyPr rtlCol="0" anchor="ctr"/>
-          <a:lstStyle/>
-          <a:p>
-            <a:pPr algn="ctr"/>
-          </a:p>
-        </p:txBody>
-      </p:sp>
-      <p:sp>
-        <p:nvSpPr>
-          <p:cNvPr id="36" name="Rectangle 35"/>
-          <p:cNvSpPr/>
-          <p:nvPr/>
-        </p:nvSpPr>
-        <p:spPr>
-          <a:xfrm>
-            <a:off x="9235440" y="1645920"/>
-            <a:ext cx="2560320" cy="63500"/>
-          </a:xfrm>
-          <a:prstGeom prst="rect">
-            <a:avLst/>
-          </a:prstGeom>
-          <a:solidFill>
-            <a:srgbClr val="FFD600"/>
-          </a:solidFill>
-          <a:ln>
-            <a:noFill/>
-          </a:ln>
-        </p:spPr>
-        <p:style>
-          <a:lnRef idx="1">
-            <a:schemeClr val="accent1"/>
-          </a:lnRef>
-          <a:fillRef idx="3">
-            <a:schemeClr val="accent1"/>
-          </a:fillRef>
-          <a:effectRef idx="2">
-            <a:schemeClr val="accent1"/>
-          </a:effectRef>
-          <a:fontRef idx="minor">
-            <a:schemeClr val="lt1"/>
-          </a:fontRef>
-        </p:style>
-        <p:txBody>
-          <a:bodyPr rtlCol="0" anchor="ctr"/>
-          <a:lstStyle/>
-          <a:p>
-            <a:pPr algn="ctr"/>
-          </a:p>
-        </p:txBody>
-      </p:sp>
-      <p:sp>
-        <p:nvSpPr>
-          <p:cNvPr id="37" name="TextBox 36"/>
-          <p:cNvSpPr txBox="1"/>
-          <p:nvPr/>
-        </p:nvSpPr>
-        <p:spPr>
-          <a:xfrm>
-            <a:off x="9418320" y="1828800"/>
-            <a:ext cx="2194560" cy="274320"/>
-          </a:xfrm>
-          <a:prstGeom prst="rect">
-            <a:avLst/>
-          </a:prstGeom>
-          <a:noFill/>
-        </p:spPr>
-        <p:txBody>
-          <a:bodyPr wrap="square">
-            <a:spAutoFit/>
-          </a:bodyPr>
-          <a:lstStyle/>
-          <a:p>
-            <a:pPr algn="l">
-              <a:defRPr sz="1200" b="1">
-                <a:solidFill>
-                  <a:srgbClr val="FFD600"/>
-                </a:solidFill>
-                <a:latin typeface="맑은 고딕"/>
-              </a:defRPr>
-            </a:pPr>
-            <a:r>
-              <a:t>Phase 4</a:t>
-            </a:r>
-          </a:p>
-        </p:txBody>
-      </p:sp>
-      <p:sp>
-        <p:nvSpPr>
-          <p:cNvPr id="38" name="TextBox 37"/>
-          <p:cNvSpPr txBox="1"/>
-          <p:nvPr/>
-        </p:nvSpPr>
-        <p:spPr>
-          <a:xfrm>
-            <a:off x="9418320" y="2103120"/>
-            <a:ext cx="2194560" cy="274320"/>
-          </a:xfrm>
-          <a:prstGeom prst="rect">
-            <a:avLst/>
-          </a:prstGeom>
-          <a:noFill/>
-        </p:spPr>
-        <p:txBody>
-          <a:bodyPr wrap="square">
-            <a:spAutoFit/>
-          </a:bodyPr>
-          <a:lstStyle/>
-          <a:p>
-            <a:pPr algn="l">
-              <a:defRPr sz="1800" b="1">
-                <a:solidFill>
-                  <a:srgbClr val="FFFFFF"/>
-                </a:solidFill>
-                <a:latin typeface="맑은 고딕"/>
-              </a:defRPr>
-            </a:pPr>
-            <a:r>
-              <a:t>양산 준비</a:t>
-            </a:r>
-          </a:p>
-        </p:txBody>
-      </p:sp>
-      <p:sp>
-        <p:nvSpPr>
-          <p:cNvPr id="39" name="TextBox 38"/>
-          <p:cNvSpPr txBox="1"/>
-          <p:nvPr/>
-        </p:nvSpPr>
-        <p:spPr>
-          <a:xfrm>
-            <a:off x="9418320" y="2468880"/>
-            <a:ext cx="2194560" cy="274320"/>
-          </a:xfrm>
-          <a:prstGeom prst="rect">
-            <a:avLst/>
-          </a:prstGeom>
-          <a:noFill/>
-        </p:spPr>
-        <p:txBody>
-          <a:bodyPr wrap="square">
-            <a:spAutoFit/>
-          </a:bodyPr>
-          <a:lstStyle/>
-          <a:p>
-            <a:pPr algn="l">
-              <a:defRPr sz="1200" b="0">
-                <a:solidFill>
-                  <a:srgbClr val="666666"/>
-                </a:solidFill>
-                <a:latin typeface="맑은 고딕"/>
-              </a:defRPr>
-            </a:pPr>
-            <a:r>
-              <a:t>18~24개월</a:t>
-            </a:r>
-          </a:p>
-        </p:txBody>
-      </p:sp>
-      <p:sp>
-        <p:nvSpPr>
-          <p:cNvPr id="40" name="Rectangle 39"/>
-          <p:cNvSpPr/>
-          <p:nvPr/>
-        </p:nvSpPr>
-        <p:spPr>
-          <a:xfrm>
-            <a:off x="9418320" y="2834640"/>
-            <a:ext cx="2194560" cy="38100"/>
-          </a:xfrm>
-          <a:prstGeom prst="rect">
-            <a:avLst/>
-          </a:prstGeom>
-          <a:solidFill>
-            <a:srgbClr val="0096D6"/>
-          </a:solidFill>
-          <a:ln>
-            <a:noFill/>
-          </a:ln>
-        </p:spPr>
-        <p:style>
-          <a:lnRef idx="1">
-            <a:schemeClr val="accent1"/>
-          </a:lnRef>
-          <a:fillRef idx="3">
-            <a:schemeClr val="accent1"/>
-          </a:fillRef>
-          <a:effectRef idx="2">
-            <a:schemeClr val="accent1"/>
-          </a:effectRef>
-          <a:fontRef idx="minor">
-            <a:schemeClr val="lt1"/>
-          </a:fontRef>
-        </p:style>
-        <p:txBody>
-          <a:bodyPr rtlCol="0" anchor="ctr"/>
-          <a:lstStyle/>
-          <a:p>
-            <a:pPr algn="ctr"/>
-          </a:p>
-        </p:txBody>
-      </p:sp>
-      <p:sp>
-        <p:nvSpPr>
-          <p:cNvPr id="41" name="TextBox 40"/>
-          <p:cNvSpPr txBox="1"/>
-          <p:nvPr/>
-        </p:nvSpPr>
-        <p:spPr>
-          <a:xfrm>
-            <a:off x="9464040" y="3017520"/>
-            <a:ext cx="2103120" cy="320040"/>
-          </a:xfrm>
-          <a:prstGeom prst="rect">
-            <a:avLst/>
-          </a:prstGeom>
-          <a:noFill/>
-        </p:spPr>
-        <p:txBody>
-          <a:bodyPr wrap="square">
-            <a:spAutoFit/>
-          </a:bodyPr>
-          <a:lstStyle/>
-          <a:p>
-            <a:pPr algn="l">
-              <a:defRPr sz="1200" b="0">
-                <a:solidFill>
-                  <a:srgbClr val="E0E0E0"/>
-                </a:solidFill>
-                <a:latin typeface="맑은 고딕"/>
-              </a:defRPr>
-            </a:pPr>
-            <a:r>
-              <a:t>▸ 양산 설계 (DFM)</a:t>
-            </a:r>
-          </a:p>
-        </p:txBody>
-      </p:sp>
-      <p:sp>
-        <p:nvSpPr>
           <p:cNvPr id="42" name="TextBox 41"/>
-          <p:cNvSpPr txBox="1"/>
-          <p:nvPr/>
-        </p:nvSpPr>
-        <p:spPr>
-          <a:xfrm>
-            <a:off x="9464040" y="3383280"/>
-            <a:ext cx="2103120" cy="320040"/>
-          </a:xfrm>
-          <a:prstGeom prst="rect">
-            <a:avLst/>
-          </a:prstGeom>
-          <a:noFill/>
-        </p:spPr>
-        <p:txBody>
-          <a:bodyPr wrap="square">
-            <a:spAutoFit/>
-          </a:bodyPr>
-          <a:lstStyle/>
-          <a:p>
-            <a:pPr algn="l">
-              <a:defRPr sz="1200" b="0">
-                <a:solidFill>
-                  <a:srgbClr val="E0E0E0"/>
-                </a:solidFill>
-                <a:latin typeface="맑은 고딕"/>
-              </a:defRPr>
-            </a:pPr>
-            <a:r>
-              <a:t>▸ 공급망 구축</a:t>
-            </a:r>
-          </a:p>
-        </p:txBody>
-      </p:sp>
-      <p:sp>
-        <p:nvSpPr>
-          <p:cNvPr id="43" name="TextBox 42"/>
-          <p:cNvSpPr txBox="1"/>
-          <p:nvPr/>
-        </p:nvSpPr>
-        <p:spPr>
-          <a:xfrm>
-            <a:off x="9464040" y="3749040"/>
-            <a:ext cx="2103120" cy="320040"/>
-          </a:xfrm>
-          <a:prstGeom prst="rect">
-            <a:avLst/>
-          </a:prstGeom>
-          <a:noFill/>
-        </p:spPr>
-        <p:txBody>
-          <a:bodyPr wrap="square">
-            <a:spAutoFit/>
-          </a:bodyPr>
-          <a:lstStyle/>
-          <a:p>
-            <a:pPr algn="l">
-              <a:defRPr sz="1200" b="0">
-                <a:solidFill>
-                  <a:srgbClr val="E0E0E0"/>
-                </a:solidFill>
-                <a:latin typeface="맑은 고딕"/>
-              </a:defRPr>
-            </a:pPr>
-            <a:r>
-              <a:t>▸ 마케팅 &amp; 영업</a:t>
-            </a:r>
-          </a:p>
-        </p:txBody>
-      </p:sp>
-      <p:sp>
-        <p:nvSpPr>
-          <p:cNvPr id="44" name="TextBox 43"/>
-          <p:cNvSpPr txBox="1"/>
-          <p:nvPr/>
-        </p:nvSpPr>
-        <p:spPr>
-          <a:xfrm>
-            <a:off x="9464040" y="4114800"/>
-            <a:ext cx="2103120" cy="320040"/>
-          </a:xfrm>
-          <a:prstGeom prst="rect">
-            <a:avLst/>
-          </a:prstGeom>
-          <a:noFill/>
-        </p:spPr>
-        <p:txBody>
-          <a:bodyPr wrap="square">
-            <a:spAutoFit/>
-          </a:bodyPr>
-          <a:lstStyle/>
-          <a:p>
-            <a:pPr algn="l">
-              <a:defRPr sz="1200" b="0">
-                <a:solidFill>
-                  <a:srgbClr val="E0E0E0"/>
-                </a:solidFill>
-                <a:latin typeface="맑은 고딕"/>
-              </a:defRPr>
-            </a:pPr>
-            <a:r>
-              <a:t>▸ 첫 고객 인도</a:t>
-            </a:r>
-          </a:p>
-        </p:txBody>
-      </p:sp>
-      <p:sp>
-        <p:nvSpPr>
-          <p:cNvPr id="45" name="Rectangle 44"/>
-          <p:cNvSpPr/>
-          <p:nvPr/>
-        </p:nvSpPr>
-        <p:spPr>
-          <a:xfrm>
-            <a:off x="731520" y="6400800"/>
-            <a:ext cx="10515600" cy="274320"/>
-          </a:xfrm>
-          <a:prstGeom prst="rect">
-            <a:avLst/>
-          </a:prstGeom>
-          <a:solidFill>
-            <a:srgbClr val="252540"/>
-          </a:solidFill>
-          <a:ln>
-            <a:noFill/>
-          </a:ln>
-        </p:spPr>
-        <p:style>
-          <a:lnRef idx="1">
-            <a:schemeClr val="accent1"/>
-          </a:lnRef>
-          <a:fillRef idx="3">
-            <a:schemeClr val="accent1"/>
-          </a:fillRef>
-          <a:effectRef idx="2">
-            <a:schemeClr val="accent1"/>
-          </a:effectRef>
-          <a:fontRef idx="minor">
-            <a:schemeClr val="lt1"/>
-          </a:fontRef>
-        </p:style>
-        <p:txBody>
-          <a:bodyPr rtlCol="0" anchor="ctr"/>
-          <a:lstStyle/>
-          <a:p>
-            <a:pPr algn="ctr"/>
-          </a:p>
-        </p:txBody>
-      </p:sp>
-      <p:sp>
-        <p:nvSpPr>
-          <p:cNvPr id="46" name="TextBox 45"/>
           <p:cNvSpPr txBox="1"/>
           <p:nvPr/>
         </p:nvSpPr>
@@ -9076,15 +8911,15 @@
           <a:lstStyle/>
           <a:p>
             <a:pPr algn="l">
-              <a:defRPr sz="1200" b="0">
-                <a:solidFill>
-                  <a:srgbClr val="666666"/>
-                </a:solidFill>
-                <a:latin typeface="맑은 고딕"/>
-              </a:defRPr>
-            </a:pPr>
-            <a:r>
-              <a:t>M1: 설계확정(6M)  →  M2: 프로토타입(12M)  →  M3: 안전인증(15M)  →  M4: 파일럿완료(18M)  →  M5: 양산개시(24M)</a:t>
+              <a:defRPr sz="1200" b="1">
+                <a:solidFill>
+                  <a:srgbClr val="FFFFFF"/>
+                </a:solidFill>
+                <a:latin typeface="맑은 고딕"/>
+              </a:defRPr>
+            </a:pPr>
+            <a:r>
+              <a:t>핵심: 양팔 COTS(기성품) 선택 → 납기 4~6주  |  SW는 기존 플랫폼 재활용  |  HW/SW 병렬 진행</a:t>
             </a:r>
           </a:p>
         </p:txBody>
@@ -11121,7 +10956,7 @@
               </a:defRPr>
             </a:pPr>
             <a:r>
-              <a:t>v0.1 Draft  |  2026-04-01  |  다음 단계: 상세 기계 설계 (CAD)</a:t>
+              <a:t>v0.2 Draft  |  2026-04-01  |  6개월 프로토타입 개발 목표</a:t>
             </a:r>
           </a:p>
         </p:txBody>
